--- a/ThesisChapter5Plots/sim-config.pptx
+++ b/ThesisChapter5Plots/sim-config.pptx
@@ -7,6 +7,7 @@
   <p:sldIdLst>
     <p:sldId id="273" r:id="rId2"/>
     <p:sldId id="274" r:id="rId3"/>
+    <p:sldId id="275" r:id="rId4"/>
   </p:sldIdLst>
   <p:sldSz cx="9906000" cy="6858000" type="A4"/>
   <p:notesSz cx="6858000" cy="9144000"/>
@@ -105,19 +106,32 @@
       </a:defRPr>
     </a:lvl9pPr>
   </p:defaultTextStyle>
+  <p:extLst>
+    <p:ext uri="{EFAFB233-063F-42B5-8137-9DF3F51BA10A}">
+      <p15:sldGuideLst xmlns:p15="http://schemas.microsoft.com/office/powerpoint/2012/main"/>
+    </p:ext>
+  </p:extLst>
 </p:presentation>
-</file>
-
-<file path=ppt/revisionInfo.xml><?xml version="1.0" encoding="utf-8"?>
-<p1510:revInfo xmlns:a="http://schemas.openxmlformats.org/drawingml/2006/main" xmlns:r="http://schemas.openxmlformats.org/officeDocument/2006/relationships" xmlns:p1510="http://schemas.microsoft.com/office/powerpoint/2015/10/main">
-  <p1510:revLst>
-    <p1510:client id="{5CC0FB08-77AD-46C0-9FA9-7BCF48480EFE}" v="1" dt="2025-04-10T10:43:01.711"/>
-  </p1510:revLst>
-</p1510:revInfo>
 </file>
 
 <file path=ppt/changesInfos/changesInfo1.xml><?xml version="1.0" encoding="utf-8"?>
 <pc:chgInfo xmlns:a="http://schemas.openxmlformats.org/drawingml/2006/main" xmlns:r="http://schemas.openxmlformats.org/officeDocument/2006/relationships" xmlns:ac="http://schemas.microsoft.com/office/drawing/2013/main/command" xmlns:pc="http://schemas.microsoft.com/office/powerpoint/2013/main/command">
+  <pc:docChgLst>
+    <pc:chgData name="KONGKAEW, PUTTIWAT" userId="a8adac1e-848f-4d84-b961-6a7ffb648b49" providerId="ADAL" clId="{E5548504-B0AA-4895-BFA7-8D48EAC9A00B}"/>
+    <pc:docChg chg="addSld">
+      <pc:chgData name="KONGKAEW, PUTTIWAT" userId="a8adac1e-848f-4d84-b961-6a7ffb648b49" providerId="ADAL" clId="{E5548504-B0AA-4895-BFA7-8D48EAC9A00B}" dt="2025-07-15T15:06:47.990" v="0" actId="680"/>
+      <pc:docMkLst>
+        <pc:docMk/>
+      </pc:docMkLst>
+      <pc:sldChg chg="new">
+        <pc:chgData name="KONGKAEW, PUTTIWAT" userId="a8adac1e-848f-4d84-b961-6a7ffb648b49" providerId="ADAL" clId="{E5548504-B0AA-4895-BFA7-8D48EAC9A00B}" dt="2025-07-15T15:06:47.990" v="0" actId="680"/>
+        <pc:sldMkLst>
+          <pc:docMk/>
+          <pc:sldMk cId="2802463678" sldId="275"/>
+        </pc:sldMkLst>
+      </pc:sldChg>
+    </pc:docChg>
+  </pc:docChgLst>
   <pc:docChgLst>
     <pc:chgData name="KONGKAEW, PUTTIWAT" userId="a8adac1e-848f-4d84-b961-6a7ffb648b49" providerId="ADAL" clId="{5CC0FB08-77AD-46C0-9FA9-7BCF48480EFE}"/>
     <pc:docChg chg="modSld">
@@ -131,94 +145,6 @@
           <pc:docMk/>
           <pc:sldMk cId="3208009416" sldId="274"/>
         </pc:sldMkLst>
-        <pc:spChg chg="mod">
-          <ac:chgData name="KONGKAEW, PUTTIWAT" userId="a8adac1e-848f-4d84-b961-6a7ffb648b49" providerId="ADAL" clId="{5CC0FB08-77AD-46C0-9FA9-7BCF48480EFE}" dt="2025-04-10T10:43:54.312" v="11" actId="113"/>
-          <ac:spMkLst>
-            <pc:docMk/>
-            <pc:sldMk cId="3208009416" sldId="274"/>
-            <ac:spMk id="36" creationId="{44720FAA-2EDF-01D2-A3F3-82571DC3B01E}"/>
-          </ac:spMkLst>
-        </pc:spChg>
-        <pc:spChg chg="mod">
-          <ac:chgData name="KONGKAEW, PUTTIWAT" userId="a8adac1e-848f-4d84-b961-6a7ffb648b49" providerId="ADAL" clId="{5CC0FB08-77AD-46C0-9FA9-7BCF48480EFE}" dt="2025-04-10T10:43:54.312" v="11" actId="113"/>
-          <ac:spMkLst>
-            <pc:docMk/>
-            <pc:sldMk cId="3208009416" sldId="274"/>
-            <ac:spMk id="84" creationId="{04C9FC3D-B000-5AEE-B293-C6C0FC111C76}"/>
-          </ac:spMkLst>
-        </pc:spChg>
-        <pc:spChg chg="mod">
-          <ac:chgData name="KONGKAEW, PUTTIWAT" userId="a8adac1e-848f-4d84-b961-6a7ffb648b49" providerId="ADAL" clId="{5CC0FB08-77AD-46C0-9FA9-7BCF48480EFE}" dt="2025-04-10T10:43:54.312" v="11" actId="113"/>
-          <ac:spMkLst>
-            <pc:docMk/>
-            <pc:sldMk cId="3208009416" sldId="274"/>
-            <ac:spMk id="91" creationId="{1DF74395-4F53-8B75-7610-6206540E3CFD}"/>
-          </ac:spMkLst>
-        </pc:spChg>
-        <pc:spChg chg="mod">
-          <ac:chgData name="KONGKAEW, PUTTIWAT" userId="a8adac1e-848f-4d84-b961-6a7ffb648b49" providerId="ADAL" clId="{5CC0FB08-77AD-46C0-9FA9-7BCF48480EFE}" dt="2025-04-10T10:43:54.312" v="11" actId="113"/>
-          <ac:spMkLst>
-            <pc:docMk/>
-            <pc:sldMk cId="3208009416" sldId="274"/>
-            <ac:spMk id="98" creationId="{6B827163-1F5B-55E5-89C2-C87B41D5975F}"/>
-          </ac:spMkLst>
-        </pc:spChg>
-        <pc:spChg chg="mod">
-          <ac:chgData name="KONGKAEW, PUTTIWAT" userId="a8adac1e-848f-4d84-b961-6a7ffb648b49" providerId="ADAL" clId="{5CC0FB08-77AD-46C0-9FA9-7BCF48480EFE}" dt="2025-04-10T10:43:54.312" v="11" actId="113"/>
-          <ac:spMkLst>
-            <pc:docMk/>
-            <pc:sldMk cId="3208009416" sldId="274"/>
-            <ac:spMk id="101" creationId="{6E2891CA-4BDB-857E-85DC-7094079AFF03}"/>
-          </ac:spMkLst>
-        </pc:spChg>
-        <pc:spChg chg="mod">
-          <ac:chgData name="KONGKAEW, PUTTIWAT" userId="a8adac1e-848f-4d84-b961-6a7ffb648b49" providerId="ADAL" clId="{5CC0FB08-77AD-46C0-9FA9-7BCF48480EFE}" dt="2025-04-10T10:43:54.312" v="11" actId="113"/>
-          <ac:spMkLst>
-            <pc:docMk/>
-            <pc:sldMk cId="3208009416" sldId="274"/>
-            <ac:spMk id="102" creationId="{A048A431-4DD9-62ED-C40F-880FD886D7C3}"/>
-          </ac:spMkLst>
-        </pc:spChg>
-        <pc:spChg chg="mod">
-          <ac:chgData name="KONGKAEW, PUTTIWAT" userId="a8adac1e-848f-4d84-b961-6a7ffb648b49" providerId="ADAL" clId="{5CC0FB08-77AD-46C0-9FA9-7BCF48480EFE}" dt="2025-04-10T10:43:54.312" v="11" actId="113"/>
-          <ac:spMkLst>
-            <pc:docMk/>
-            <pc:sldMk cId="3208009416" sldId="274"/>
-            <ac:spMk id="133" creationId="{130BDAE8-FF13-7A49-38B4-B65A8CC5B4FE}"/>
-          </ac:spMkLst>
-        </pc:spChg>
-        <pc:spChg chg="mod">
-          <ac:chgData name="KONGKAEW, PUTTIWAT" userId="a8adac1e-848f-4d84-b961-6a7ffb648b49" providerId="ADAL" clId="{5CC0FB08-77AD-46C0-9FA9-7BCF48480EFE}" dt="2025-04-10T10:43:54.312" v="11" actId="113"/>
-          <ac:spMkLst>
-            <pc:docMk/>
-            <pc:sldMk cId="3208009416" sldId="274"/>
-            <ac:spMk id="134" creationId="{99214343-745A-59A9-42D9-7776A9D90122}"/>
-          </ac:spMkLst>
-        </pc:spChg>
-        <pc:spChg chg="mod">
-          <ac:chgData name="KONGKAEW, PUTTIWAT" userId="a8adac1e-848f-4d84-b961-6a7ffb648b49" providerId="ADAL" clId="{5CC0FB08-77AD-46C0-9FA9-7BCF48480EFE}" dt="2025-04-10T10:43:54.312" v="11" actId="113"/>
-          <ac:spMkLst>
-            <pc:docMk/>
-            <pc:sldMk cId="3208009416" sldId="274"/>
-            <ac:spMk id="155" creationId="{55EEB2DA-B513-4F5C-804A-00A9C000874A}"/>
-          </ac:spMkLst>
-        </pc:spChg>
-        <pc:spChg chg="mod">
-          <ac:chgData name="KONGKAEW, PUTTIWAT" userId="a8adac1e-848f-4d84-b961-6a7ffb648b49" providerId="ADAL" clId="{5CC0FB08-77AD-46C0-9FA9-7BCF48480EFE}" dt="2025-04-10T10:43:54.312" v="11" actId="113"/>
-          <ac:spMkLst>
-            <pc:docMk/>
-            <pc:sldMk cId="3208009416" sldId="274"/>
-            <ac:spMk id="157" creationId="{58FFA128-0448-DFB1-9591-41E6DB5A6354}"/>
-          </ac:spMkLst>
-        </pc:spChg>
-        <pc:grpChg chg="mod">
-          <ac:chgData name="KONGKAEW, PUTTIWAT" userId="a8adac1e-848f-4d84-b961-6a7ffb648b49" providerId="ADAL" clId="{5CC0FB08-77AD-46C0-9FA9-7BCF48480EFE}" dt="2025-04-10T10:44:07.995" v="12" actId="1076"/>
-          <ac:grpSpMkLst>
-            <pc:docMk/>
-            <pc:sldMk cId="3208009416" sldId="274"/>
-            <ac:grpSpMk id="179" creationId="{3868C3A2-A7E4-4D5C-18BB-DDC0EE838ED2}"/>
-          </ac:grpSpMkLst>
-        </pc:grpChg>
       </pc:sldChg>
     </pc:docChg>
   </pc:docChgLst>
@@ -2074,7 +2000,7 @@
           <a:p>
             <a:fld id="{95A529A4-EFCF-4CCE-BB9B-DACA4963B9D1}" type="datetimeFigureOut">
               <a:rPr lang="en-GB" smtClean="0"/>
-              <a:t>2025-04-10</a:t>
+              <a:t>2025-07-15</a:t>
             </a:fld>
             <a:endParaRPr lang="en-GB"/>
           </a:p>
@@ -2412,7 +2338,7 @@
           <a:p>
             <a:fld id="{95A529A4-EFCF-4CCE-BB9B-DACA4963B9D1}" type="datetimeFigureOut">
               <a:rPr lang="en-GB" smtClean="0"/>
-              <a:t>2025-04-10</a:t>
+              <a:t>2025-07-15</a:t>
             </a:fld>
             <a:endParaRPr lang="en-GB"/>
           </a:p>
@@ -2818,7 +2744,7 @@
           <a:p>
             <a:fld id="{95A529A4-EFCF-4CCE-BB9B-DACA4963B9D1}" type="datetimeFigureOut">
               <a:rPr lang="en-GB" smtClean="0"/>
-              <a:t>2025-04-10</a:t>
+              <a:t>2025-07-15</a:t>
             </a:fld>
             <a:endParaRPr lang="en-GB"/>
           </a:p>
@@ -2931,7 +2857,7 @@
           <a:p>
             <a:fld id="{770BAE4F-7CF4-42F3-8FAE-D0D6D3382E92}" type="datetimeFigureOut">
               <a:rPr lang="en-GB" smtClean="0"/>
-              <a:t>2025-04-10</a:t>
+              <a:t>2025-07-15</a:t>
             </a:fld>
             <a:endParaRPr lang="en-GB"/>
           </a:p>
@@ -3182,7 +3108,7 @@
           <a:p>
             <a:fld id="{95A529A4-EFCF-4CCE-BB9B-DACA4963B9D1}" type="datetimeFigureOut">
               <a:rPr lang="en-GB" smtClean="0"/>
-              <a:t>2025-04-10</a:t>
+              <a:t>2025-07-15</a:t>
             </a:fld>
             <a:endParaRPr lang="en-GB"/>
           </a:p>
@@ -18654,6 +18580,36 @@
 </p:sld>
 </file>
 
+<file path=ppt/slides/slide3.xml><?xml version="1.0" encoding="utf-8"?>
+<p:sld xmlns:a="http://schemas.openxmlformats.org/drawingml/2006/main" xmlns:r="http://schemas.openxmlformats.org/officeDocument/2006/relationships" xmlns:p="http://schemas.openxmlformats.org/presentationml/2006/main">
+  <p:cSld>
+    <p:spTree>
+      <p:nvGrpSpPr>
+        <p:cNvPr id="1" name=""/>
+        <p:cNvGrpSpPr/>
+        <p:nvPr/>
+      </p:nvGrpSpPr>
+      <p:grpSpPr>
+        <a:xfrm>
+          <a:off x="0" y="0"/>
+          <a:ext cx="0" cy="0"/>
+          <a:chOff x="0" y="0"/>
+          <a:chExt cx="0" cy="0"/>
+        </a:xfrm>
+      </p:grpSpPr>
+    </p:spTree>
+    <p:extLst>
+      <p:ext uri="{BB962C8B-B14F-4D97-AF65-F5344CB8AC3E}">
+        <p14:creationId xmlns:p14="http://schemas.microsoft.com/office/powerpoint/2010/main" val="2802463678"/>
+      </p:ext>
+    </p:extLst>
+  </p:cSld>
+  <p:clrMapOvr>
+    <a:masterClrMapping/>
+  </p:clrMapOvr>
+</p:sld>
+</file>
+
 <file path=ppt/theme/theme1.xml><?xml version="1.0" encoding="utf-8"?>
 <a:theme xmlns:a="http://schemas.openxmlformats.org/drawingml/2006/main" name="CfAI_adjusted3">
   <a:themeElements>
